--- a/raw/utama-en/00-Slide-Kuliah/06-input-output-and-modularity.pptx
+++ b/raw/utama-en/00-Slide-Kuliah/06-input-output-and-modularity.pptx
@@ -7805,7 +7805,7 @@
           <a:lstStyle/>
           <a:p>
             <a:r>
-              <a:t>Short Quiz</a:t>
+              <a:t>Short Exercise</a:t>
             </a:r>
           </a:p>
         </p:txBody>
@@ -8841,7 +8841,7 @@
                             <a:srgbClr val="404040"/>
                           </a:solidFill>
                         </a:rPr>
-                        <a:t>Quiz and exit ticket</a:t>
+                        <a:t>Exercise and exit ticket</a:t>
                       </a:r>
                     </a:p>
                   </a:txBody>
